--- a/CS461_Midterm_Review_Quiz1_Quiz2_v3.pptx
+++ b/CS461_Midterm_Review_Quiz1_Quiz2_v3.pptx
@@ -10082,7 +10082,7 @@
                   <a:schemeClr val="tx1"/>
                 </a:solidFill>
               </a:rPr>
-              <a:t>(Versions B/D: 3×3 convolutions, stride 3, on a 27 × 27 image.)</a:t>
+              <a:t>(Versions B: 3×3 convolutions, stride 3, on a 27 × 27 image.)</a:t>
             </a:r>
             <a:endParaRPr lang="en-US" sz="1800" dirty="0"/>
           </a:p>
@@ -12172,7 +12172,7 @@
                   <a:schemeClr val="tx1"/>
                 </a:solidFill>
               </a:rPr>
-              <a:t>(Versions B/D: 3×3 kernels; linear layer 100 → 20.)</a:t>
+              <a:t>(Versions B: 3×3 kernels; linear layer 100 → 20.)</a:t>
             </a:r>
             <a:endParaRPr lang="en-US" sz="1800" dirty="0"/>
           </a:p>
@@ -25592,6 +25592,36 @@
           </a:p>
         </p:txBody>
       </p:sp>
+      <p:pic>
+        <p:nvPicPr>
+          <p:cNvPr id="8" name="图片 7">
+            <a:extLst>
+              <a:ext uri="{FF2B5EF4-FFF2-40B4-BE49-F238E27FC236}">
+                <a16:creationId xmlns:a16="http://schemas.microsoft.com/office/drawing/2014/main" id="{DC1E7BCB-EFCA-9BAD-1C48-A21B8075A22C}"/>
+              </a:ext>
+            </a:extLst>
+          </p:cNvPr>
+          <p:cNvPicPr>
+            <a:picLocks noChangeAspect="1"/>
+          </p:cNvPicPr>
+          <p:nvPr/>
+        </p:nvPicPr>
+        <p:blipFill>
+          <a:blip r:embed="rId3"/>
+          <a:stretch>
+            <a:fillRect/>
+          </a:stretch>
+        </p:blipFill>
+        <p:spPr>
+          <a:xfrm>
+            <a:off x="1896936" y="3236468"/>
+            <a:ext cx="3736445" cy="2687132"/>
+          </a:xfrm>
+          <a:prstGeom prst="rect">
+            <a:avLst/>
+          </a:prstGeom>
+        </p:spPr>
+      </p:pic>
     </p:spTree>
   </p:cSld>
   <p:clrMapOvr>
@@ -27464,7 +27494,29 @@
                 <a:ea typeface="Cambria" pitchFamily="34" charset="-122"/>
                 <a:cs typeface="Cambria" pitchFamily="34" charset="-120"/>
               </a:rPr>
-              <a:t>Fair, Fair, Unfair, Unfair</a:t>
+              <a:t>Fair, Fair, </a:t>
+            </a:r>
+            <a:r>
+              <a:rPr lang="en-US" altLang="zh-CN" sz="2000" b="1" dirty="0">
+                <a:solidFill>
+                  <a:srgbClr val="FFFFFF"/>
+                </a:solidFill>
+                <a:latin typeface="Cambria" pitchFamily="34" charset="0"/>
+                <a:ea typeface="Cambria" pitchFamily="34" charset="-122"/>
+                <a:cs typeface="Cambria" pitchFamily="34" charset="-120"/>
+              </a:rPr>
+              <a:t>Equal</a:t>
+            </a:r>
+            <a:r>
+              <a:rPr lang="en-US" sz="2000" b="1" dirty="0">
+                <a:solidFill>
+                  <a:srgbClr val="FFFFFF"/>
+                </a:solidFill>
+                <a:latin typeface="Cambria" pitchFamily="34" charset="0"/>
+                <a:ea typeface="Cambria" pitchFamily="34" charset="-122"/>
+                <a:cs typeface="Cambria" pitchFamily="34" charset="-120"/>
+              </a:rPr>
+              <a:t>, Unfair</a:t>
             </a:r>
             <a:endParaRPr lang="en-US" sz="2000" dirty="0"/>
           </a:p>
@@ -28995,24 +29047,6 @@
             </a:r>
             <a:endParaRPr lang="en-US" sz="1400" dirty="0"/>
           </a:p>
-          <a:p>
-            <a:pPr marL="342900" indent="-342900">
-              <a:spcAft>
-                <a:spcPts val="500"/>
-              </a:spcAft>
-              <a:buSzPct val="100000"/>
-              <a:buChar char="•"/>
-            </a:pPr>
-            <a:r>
-              <a:rPr lang="en-US" sz="1400" dirty="0">
-                <a:solidFill>
-                  <a:srgbClr val="D6DEEA"/>
-                </a:solidFill>
-              </a:rPr>
-              <a:t>The δ tie at roll 3 is not “equal”: backtracking from the end decides.</a:t>
-            </a:r>
-            <a:endParaRPr lang="en-US" sz="1400" dirty="0"/>
-          </a:p>
         </p:txBody>
       </p:sp>
       <p:sp>
@@ -29060,6 +29094,36 @@
           </a:p>
         </p:txBody>
       </p:sp>
+      <p:pic>
+        <p:nvPicPr>
+          <p:cNvPr id="12" name="图片 11">
+            <a:extLst>
+              <a:ext uri="{FF2B5EF4-FFF2-40B4-BE49-F238E27FC236}">
+                <a16:creationId xmlns:a16="http://schemas.microsoft.com/office/drawing/2014/main" id="{987827E5-45BA-8E1B-51B6-6AAE5A9F6742}"/>
+              </a:ext>
+            </a:extLst>
+          </p:cNvPr>
+          <p:cNvPicPr>
+            <a:picLocks noChangeAspect="1"/>
+          </p:cNvPicPr>
+          <p:nvPr/>
+        </p:nvPicPr>
+        <p:blipFill>
+          <a:blip r:embed="rId3"/>
+          <a:stretch>
+            <a:fillRect/>
+          </a:stretch>
+        </p:blipFill>
+        <p:spPr>
+          <a:xfrm>
+            <a:off x="1896936" y="3236468"/>
+            <a:ext cx="3736445" cy="2687132"/>
+          </a:xfrm>
+          <a:prstGeom prst="rect">
+            <a:avLst/>
+          </a:prstGeom>
+        </p:spPr>
+      </p:pic>
     </p:spTree>
   </p:cSld>
   <p:clrMapOvr>
@@ -29224,24 +29288,6 @@
             </a:r>
             <a:endParaRPr lang="en-US" sz="1800" dirty="0"/>
           </a:p>
-          <a:p>
-            <a:pPr marL="342900" indent="-342900">
-              <a:spcAft>
-                <a:spcPts val="600"/>
-              </a:spcAft>
-              <a:buSzPct val="100000"/>
-              <a:buChar char="•"/>
-            </a:pPr>
-            <a:r>
-              <a:rPr lang="en-US" sz="1800" dirty="0">
-                <a:solidFill>
-                  <a:schemeClr val="tx1"/>
-                </a:solidFill>
-              </a:rPr>
-              <a:t>Remember: write “equal” only if the best paths tie.</a:t>
-            </a:r>
-            <a:endParaRPr lang="en-US" sz="1800" dirty="0"/>
-          </a:p>
         </p:txBody>
       </p:sp>
       <p:sp>
@@ -29574,24 +29620,6 @@
                 </a:solidFill>
               </a:rPr>
               <a:t>Stay with probability 3/4, switch with 1/4; start 1/2, 1/2.</a:t>
-            </a:r>
-            <a:endParaRPr lang="en-US" sz="1800" dirty="0"/>
-          </a:p>
-          <a:p>
-            <a:pPr marL="342900" indent="-342900">
-              <a:spcAft>
-                <a:spcPts val="600"/>
-              </a:spcAft>
-              <a:buSzPct val="100000"/>
-              <a:buChar char="•"/>
-            </a:pPr>
-            <a:r>
-              <a:rPr lang="en-US" sz="1800" dirty="0">
-                <a:solidFill>
-                  <a:schemeClr val="tx1"/>
-                </a:solidFill>
-              </a:rPr>
-              <a:t>Remember: write “equal” only if the best paths tie.</a:t>
             </a:r>
             <a:endParaRPr lang="en-US" sz="1800" dirty="0"/>
           </a:p>
@@ -31227,7 +31255,7 @@
                   <a:srgbClr val="D6DEEA"/>
                 </a:solidFill>
               </a:rPr>
-              <a:t>The final values tie, and both paths share rolls 1–3, so roll 4 is “equal”.</a:t>
+              <a:t>The final values tie, and both paths share rolls 1–3</a:t>
             </a:r>
             <a:endParaRPr lang="en-US" sz="1400" dirty="0"/>
           </a:p>
